--- a/curso/pptx/S65.pptx
+++ b/curso/pptx/S65.pptx
@@ -4494,7 +4494,7 @@
                 </a:solidFill>
                 <a:latin typeface="Nunito Sans"/>
               </a:rPr>
-              <a:t>Es lo que acercó a los dos grupos del campamento</a:t>
+              <a:t>正是合作让营地里的两个组靠近了</a:t>
             </a:r>
           </a:p>
           <a:p>
@@ -4519,7 +4519,7 @@
                 </a:solidFill>
                 <a:latin typeface="Nunito Sans"/>
               </a:rPr>
-              <a:t>Competir no es malo, pero puede enfrentar a los grupos</a:t>
+              <a:t>竞争并不坏，但可能让不同的集体对立起来</a:t>
             </a:r>
           </a:p>
           <a:p>
@@ -4544,7 +4544,7 @@
                 </a:solidFill>
                 <a:latin typeface="Nunito Sans"/>
               </a:rPr>
-              <a:t>Los chicos no sabían que era un experimento: hoy eso se critica</a:t>
+              <a:t>这些男孩不知道这是个实验：今天人们会批评这一点</a:t>
             </a:r>
           </a:p>
         </p:txBody>
@@ -6972,7 +6972,7 @@
                 </a:solidFill>
                 <a:latin typeface="Nunito Sans"/>
               </a:rPr>
-              <a:t>Un grupo cohesionado </a:t>
+              <a:t>有凝聚力的集体</a:t>
             </a:r>
             <a:r>
               <a:rPr sz="2800" b="1">
@@ -6981,7 +6981,7 @@
                 </a:solidFill>
                 <a:latin typeface="Nunito Sans"/>
               </a:rPr>
-              <a:t>suele</a:t>
+              <a:t>通常</a:t>
             </a:r>
             <a:r>
               <a:rPr sz="2800" b="0">
@@ -6990,7 +6990,7 @@
                 </a:solidFill>
                 <a:latin typeface="Nunito Sans"/>
               </a:rPr>
-              <a:t> trabajar mejor y ayudarse más</a:t>
+              <a:t>工作得更好，也更互相帮助</a:t>
             </a:r>
           </a:p>
           <a:p>
@@ -7015,7 +7015,7 @@
                 </a:solidFill>
                 <a:latin typeface="Nunito Sans"/>
               </a:rPr>
-              <a:t>Suele arreglar mejor sus conflictos (sus peleas y desacuerdos)</a:t>
+              <a:t>通常也能更好地解决冲突（争吵和分歧）</a:t>
             </a:r>
           </a:p>
           <a:p>
@@ -7040,7 +7040,7 @@
                 </a:solidFill>
                 <a:latin typeface="Nunito Sans"/>
               </a:rPr>
-              <a:t>Hay grupos con mucha y con poca: no es todo o nada</a:t>
+              <a:t>有的集体凝聚力强，有的弱：不是“有”或“没有”那么绝对</a:t>
             </a:r>
           </a:p>
         </p:txBody>
@@ -7231,7 +7231,7 @@
                 </a:solidFill>
                 <a:latin typeface="Nunito Sans"/>
               </a:rPr>
-              <a:t>Participación:</a:t>
+              <a:t>参与：</a:t>
             </a:r>
             <a:r>
               <a:rPr sz="2800" b="0">
@@ -7240,7 +7240,7 @@
                 </a:solidFill>
                 <a:latin typeface="Nunito Sans"/>
               </a:rPr>
-              <a:t> ¿deciden todos, o solo los que más hablan?</a:t>
+              <a:t>是所有人一起做决定，还是只有话最多的人说了算？</a:t>
             </a:r>
           </a:p>
           <a:p>
@@ -7265,7 +7265,7 @@
                 </a:solidFill>
                 <a:latin typeface="Nunito Sans"/>
               </a:rPr>
-              <a:t>Relación:</a:t>
+              <a:t>关系：</a:t>
             </a:r>
             <a:r>
               <a:rPr sz="2800" b="0">
@@ -7274,7 +7274,7 @@
                 </a:solidFill>
                 <a:latin typeface="Nunito Sans"/>
               </a:rPr>
-              <a:t> ¿se llevan bien, también fuera de cada cuadrilla?</a:t>
+              <a:t>大家相处得好吗，在各自的小圈子之外也是这样吗？</a:t>
             </a:r>
           </a:p>
           <a:p>
@@ -7299,7 +7299,7 @@
                 </a:solidFill>
                 <a:latin typeface="Nunito Sans"/>
               </a:rPr>
-              <a:t>Inclusión:</a:t>
+              <a:t>包容：</a:t>
             </a:r>
             <a:r>
               <a:rPr sz="2800" b="0">
@@ -7308,7 +7308,7 @@
                 </a:solidFill>
                 <a:latin typeface="Nunito Sans"/>
               </a:rPr>
-              <a:t> ¿alguien se queda fuera por ser diferente?</a:t>
+              <a:t>有没有人因为与众不同而被排除在外？</a:t>
             </a:r>
           </a:p>
           <a:p>
@@ -7333,7 +7333,7 @@
                 </a:solidFill>
                 <a:latin typeface="Nunito Sans"/>
               </a:rPr>
-              <a:t>Cooperación:</a:t>
+              <a:t>合作：</a:t>
             </a:r>
             <a:r>
               <a:rPr sz="2800" b="0">
@@ -7342,7 +7342,7 @@
                 </a:solidFill>
                 <a:latin typeface="Nunito Sans"/>
               </a:rPr>
-              <a:t> ¿ven que juntos consiguen más?</a:t>
+              <a:t>大家看到在一起能取得更多成果吗？</a:t>
             </a:r>
           </a:p>
           <a:p>
@@ -7367,7 +7367,7 @@
                 </a:solidFill>
                 <a:latin typeface="Nunito Sans"/>
               </a:rPr>
-              <a:t>Solidaridad:</a:t>
+              <a:t>互助：</a:t>
             </a:r>
             <a:r>
               <a:rPr sz="2800" b="0">
@@ -7376,7 +7376,7 @@
                 </a:solidFill>
                 <a:latin typeface="Nunito Sans"/>
               </a:rPr>
-              <a:t> ¿se ayudan y respetan las diferencias?</a:t>
+              <a:t>大家互相帮助、尊重彼此的差异吗？</a:t>
             </a:r>
           </a:p>
         </p:txBody>
@@ -7610,7 +7610,7 @@
                 </a:solidFill>
                 <a:latin typeface="Nunito Sans"/>
               </a:rPr>
-              <a:t>Que todos piensen igual</a:t>
+              <a:t>所有人想法都一样</a:t>
             </a:r>
           </a:p>
           <a:p>
@@ -7635,7 +7635,7 @@
                 </a:solidFill>
                 <a:latin typeface="Nunito Sans"/>
               </a:rPr>
-              <a:t>Callar lo que piensas para no desentonar (la conformidad, 第29课)</a:t>
+              <a:t>为了不显得格格不入，把自己的想法藏在心里（从众，第29课）</a:t>
             </a:r>
           </a:p>
           <a:p>
@@ -7660,7 +7660,7 @@
                 </a:solidFill>
                 <a:latin typeface="Nunito Sans"/>
               </a:rPr>
-              <a:t>Cerrarse a los de fuera</a:t>
+              <a:t>对外人关上大门</a:t>
             </a:r>
           </a:p>
           <a:p>
@@ -7685,7 +7685,7 @@
                 </a:solidFill>
                 <a:latin typeface="Nunito Sans"/>
               </a:rPr>
-              <a:t>Dejar a alguien fuera</a:t>
+              <a:t>把某个人排除在外</a:t>
             </a:r>
           </a:p>
         </p:txBody>
@@ -7815,7 +7815,7 @@
                 </a:solidFill>
                 <a:latin typeface="Nunito Sans"/>
               </a:rPr>
-              <a:t>Querer estar y hacer cosas juntos</a:t>
+              <a:t>愿意待在一起、一起做事</a:t>
             </a:r>
           </a:p>
           <a:p>
@@ -7840,7 +7840,7 @@
                 </a:solidFill>
                 <a:latin typeface="Nunito Sans"/>
               </a:rPr>
-              <a:t>Poder decir «no estoy de acuerdo» sin miedo</a:t>
+              <a:t>能够毫不害怕地说“我不同意”</a:t>
             </a:r>
           </a:p>
           <a:p>
@@ -7865,7 +7865,7 @@
                 </a:solidFill>
                 <a:latin typeface="Nunito Sans"/>
               </a:rPr>
-              <a:t>Abrirse a los que llegan</a:t>
+              <a:t>接纳新来的人</a:t>
             </a:r>
           </a:p>
           <a:p>
@@ -7890,7 +7890,7 @@
                 </a:solidFill>
                 <a:latin typeface="Nunito Sans"/>
               </a:rPr>
-              <a:t>Ayudarse unos a otros</a:t>
+              <a:t>互相帮助</a:t>
             </a:r>
           </a:p>
         </p:txBody>

--- a/curso/pptx/S65.pptx
+++ b/curso/pptx/S65.pptx
@@ -4648,7 +4648,7 @@
                 </a:solidFill>
                 <a:latin typeface="Fredoka"/>
               </a:rPr>
-              <a:t>案例 · 玛亚伦的球队</a:t>
+              <a:t>案例 · 一个女孩的球队</a:t>
             </a:r>
           </a:p>
         </p:txBody>
@@ -4730,7 +4730,7 @@
                 </a:solidFill>
                 <a:latin typeface="Nunito Sans"/>
               </a:rPr>
-              <a:t>玛亚伦的手球队在比赛中互相鼓励得很起劲。可是在更衣室里，有两派人互不说话，新来的女孩总是一个人换衣服。</a:t>
+              <a:t>一个女孩的手球队在比赛中互相鼓励得很起劲。可是在更衣室里，有两派人互不说话，新来的女孩总是一个人换衣服。</a:t>
             </a:r>
           </a:p>
         </p:txBody>
@@ -5039,7 +5039,7 @@
                 </a:solidFill>
                 <a:latin typeface="Nunito Sans"/>
               </a:rPr>
-              <a:t>在伊克尔的朋友圈里，要选活动的时候，每个人都说出自己的想法，常常意见不一致。然后他们做出决定，继续聚在一起。</a:t>
+              <a:t>在一个男孩的朋友圈里，要选活动的时候，每个人都说出自己的想法，常常意见不一致。然后他们做出决定，继续聚在一起。</a:t>
             </a:r>
           </a:p>
         </p:txBody>
